--- a/examples/ppt/tables/tables-borders.pptx
+++ b/examples/ppt/tables/tables-borders.pptx
@@ -5,9 +5,9 @@
     <p:sldMasterId xmlns:r="http://schemas.openxmlformats.org/officeDocument/2006/relationships" id="2147483648" r:id="rId1"/>
   </p:sldMasterIdLst>
   <p:sldIdLst>
-    <p:sldId id="256" r:id="R8d106776ca1d4529"/>
-    <p:sldId id="257" r:id="Rfb728b6e335c4b71"/>
-    <p:sldId id="258" r:id="R0e9ded95729e45e4"/>
+    <p:sldId id="256" r:id="R5f0a29136fd8424f"/>
+    <p:sldId id="257" r:id="R5b1b6e04248e4f83"/>
+    <p:sldId id="258" r:id="R2bbbf1c2b4404893"/>
   </p:sldIdLst>
   <p:sldSz cx="12192000" cy="6858000"/>
   <p:notesSz cx="6858000" cy="9144000"/>
@@ -282,7 +282,7 @@
 </file>
 
 <file path=ppt/slideMasters/slideMaster1.xml><?xml version="1.0" encoding="utf-8"?>
-<p:sldMaster xmlns:p="http://schemas.openxmlformats.org/presentationml/2006/main">
+<p:sldMaster xmlns:r="http://schemas.openxmlformats.org/officeDocument/2006/relationships" xmlns:p="http://schemas.openxmlformats.org/presentationml/2006/main">
   <p:cSld>
     <p:spTree>
       <p:nvGrpSpPr>
